--- a/Презентация.pptx
+++ b/Презентация.pptx
@@ -4688,7 +4688,7 @@
             </a:pPr>
             <a:r>
               <a:rPr/>
-              <a:t>Источники: Лутц М. «Изучаем Python»</a:t>
+              <a:t>; Источники: Лутц М. «Изучаем Python»</a:t>
             </a:r>
             <a:endParaRPr/>
           </a:p>
@@ -6078,6 +6078,10 @@
                       <a:r>
                         <a:rPr/>
                         <a:t>KeePass</a:t>
+                      </a:r>
+                      <a:r>
+                        <a:rPr/>
+                        <a:t>XC</a:t>
                       </a:r>
                       <a:endParaRPr/>
                     </a:p>
@@ -7313,7 +7317,7 @@
         </p:nvSpPr>
         <p:spPr bwMode="auto">
           <a:xfrm>
-            <a:off x="-15087" y="0"/>
+            <a:off x="-15086" y="0"/>
             <a:ext cx="12191695" cy="6858000"/>
           </a:xfrm>
           <a:prstGeom prst="rect">
@@ -7973,9 +7977,116 @@
           </a:p>
         </p:txBody>
       </p:sp>
+      <p:sp>
+        <p:nvSpPr>
+          <p:cNvPr id="7" name="TextBox 6"/>
+          <p:cNvSpPr txBox="1"/>
+          <p:nvPr/>
+        </p:nvSpPr>
+        <p:spPr bwMode="auto">
+          <a:xfrm>
+            <a:off x="7635240" y="1600200"/>
+            <a:ext cx="4023360" cy="3383280"/>
+          </a:xfrm>
+          <a:prstGeom prst="rect">
+            <a:avLst/>
+          </a:prstGeom>
+          <a:noFill/>
+        </p:spPr>
+        <p:txBody>
+          <a:bodyPr wrap="square">
+            <a:spAutoFit/>
+          </a:bodyPr>
+          <a:lstStyle/>
+          <a:p>
+            <a:pPr marL="342900" indent="-171450">
+              <a:lnSpc>
+                <a:spcPct val="105000"/>
+              </a:lnSpc>
+              <a:spcAft>
+                <a:spcPts val="600"/>
+              </a:spcAft>
+              <a:defRPr sz="2100">
+                <a:solidFill>
+                  <a:srgbClr val="1E1E1E"/>
+                </a:solidFill>
+                <a:latin typeface="Arial"/>
+              </a:defRPr>
+            </a:pPr>
+            <a:r>
+              <a:rPr/>
+              <a:t>Слева — таблица записей.</a:t>
+            </a:r>
+            <a:endParaRPr/>
+          </a:p>
+          <a:p>
+            <a:pPr marL="342900" indent="-171450">
+              <a:lnSpc>
+                <a:spcPct val="105000"/>
+              </a:lnSpc>
+              <a:spcAft>
+                <a:spcPts val="600"/>
+              </a:spcAft>
+              <a:defRPr sz="2100">
+                <a:solidFill>
+                  <a:srgbClr val="1E1E1E"/>
+                </a:solidFill>
+                <a:latin typeface="Arial"/>
+              </a:defRPr>
+            </a:pPr>
+            <a:r>
+              <a:rPr/>
+              <a:t>Справа — форма для ввода.</a:t>
+            </a:r>
+            <a:endParaRPr/>
+          </a:p>
+          <a:p>
+            <a:pPr marL="342900" indent="-171450">
+              <a:lnSpc>
+                <a:spcPct val="105000"/>
+              </a:lnSpc>
+              <a:spcAft>
+                <a:spcPts val="600"/>
+              </a:spcAft>
+              <a:defRPr sz="2100">
+                <a:solidFill>
+                  <a:srgbClr val="1E1E1E"/>
+                </a:solidFill>
+                <a:latin typeface="Arial"/>
+              </a:defRPr>
+            </a:pPr>
+            <a:r>
+              <a:rPr/>
+              <a:t>Вверху — поиск.</a:t>
+            </a:r>
+            <a:endParaRPr/>
+          </a:p>
+          <a:p>
+            <a:pPr marL="342900" indent="-171450">
+              <a:lnSpc>
+                <a:spcPct val="105000"/>
+              </a:lnSpc>
+              <a:spcAft>
+                <a:spcPts val="600"/>
+              </a:spcAft>
+              <a:defRPr sz="2100">
+                <a:solidFill>
+                  <a:srgbClr val="1E1E1E"/>
+                </a:solidFill>
+                <a:latin typeface="Arial"/>
+              </a:defRPr>
+            </a:pPr>
+            <a:r>
+              <a:rPr/>
+              <a:t>Дизайн простой, без лишних эффектов.</a:t>
+            </a:r>
+            <a:endParaRPr/>
+          </a:p>
+        </p:txBody>
+      </p:sp>
       <p:pic>
         <p:nvPicPr>
-          <p:cNvPr id="6" name="Picture 5" descr="app_screenshot_treeview.png"/>
+          <p:cNvPr id="480338338" name=""/>
           <p:cNvPicPr>
             <a:picLocks noChangeAspect="1"/>
           </p:cNvPicPr>
@@ -7986,122 +8097,15 @@
           <a:stretch/>
         </p:blipFill>
         <p:spPr bwMode="auto">
-          <a:xfrm>
-            <a:off x="685800" y="1325880"/>
-            <a:ext cx="6675120" cy="4338828"/>
+          <a:xfrm flipH="0" flipV="0">
+            <a:off x="671512" y="1142999"/>
+            <a:ext cx="5873137" cy="5414186"/>
           </a:xfrm>
           <a:prstGeom prst="rect">
             <a:avLst/>
           </a:prstGeom>
         </p:spPr>
       </p:pic>
-      <p:sp>
-        <p:nvSpPr>
-          <p:cNvPr id="7" name="TextBox 6"/>
-          <p:cNvSpPr txBox="1"/>
-          <p:nvPr/>
-        </p:nvSpPr>
-        <p:spPr bwMode="auto">
-          <a:xfrm>
-            <a:off x="7635240" y="1600200"/>
-            <a:ext cx="4023360" cy="3383280"/>
-          </a:xfrm>
-          <a:prstGeom prst="rect">
-            <a:avLst/>
-          </a:prstGeom>
-          <a:noFill/>
-        </p:spPr>
-        <p:txBody>
-          <a:bodyPr wrap="square">
-            <a:spAutoFit/>
-          </a:bodyPr>
-          <a:lstStyle/>
-          <a:p>
-            <a:pPr marL="342900" indent="-171450">
-              <a:lnSpc>
-                <a:spcPct val="105000"/>
-              </a:lnSpc>
-              <a:spcAft>
-                <a:spcPts val="600"/>
-              </a:spcAft>
-              <a:defRPr sz="2100">
-                <a:solidFill>
-                  <a:srgbClr val="1E1E1E"/>
-                </a:solidFill>
-                <a:latin typeface="Arial"/>
-              </a:defRPr>
-            </a:pPr>
-            <a:r>
-              <a:rPr/>
-              <a:t>Слева — таблица записей.</a:t>
-            </a:r>
-            <a:endParaRPr/>
-          </a:p>
-          <a:p>
-            <a:pPr marL="342900" indent="-171450">
-              <a:lnSpc>
-                <a:spcPct val="105000"/>
-              </a:lnSpc>
-              <a:spcAft>
-                <a:spcPts val="600"/>
-              </a:spcAft>
-              <a:defRPr sz="2100">
-                <a:solidFill>
-                  <a:srgbClr val="1E1E1E"/>
-                </a:solidFill>
-                <a:latin typeface="Arial"/>
-              </a:defRPr>
-            </a:pPr>
-            <a:r>
-              <a:rPr/>
-              <a:t>Справа — форма для ввода.</a:t>
-            </a:r>
-            <a:endParaRPr/>
-          </a:p>
-          <a:p>
-            <a:pPr marL="342900" indent="-171450">
-              <a:lnSpc>
-                <a:spcPct val="105000"/>
-              </a:lnSpc>
-              <a:spcAft>
-                <a:spcPts val="600"/>
-              </a:spcAft>
-              <a:defRPr sz="2100">
-                <a:solidFill>
-                  <a:srgbClr val="1E1E1E"/>
-                </a:solidFill>
-                <a:latin typeface="Arial"/>
-              </a:defRPr>
-            </a:pPr>
-            <a:r>
-              <a:rPr/>
-              <a:t>Вверху — поиск.</a:t>
-            </a:r>
-            <a:endParaRPr/>
-          </a:p>
-          <a:p>
-            <a:pPr marL="342900" indent="-171450">
-              <a:lnSpc>
-                <a:spcPct val="105000"/>
-              </a:lnSpc>
-              <a:spcAft>
-                <a:spcPts val="600"/>
-              </a:spcAft>
-              <a:defRPr sz="2100">
-                <a:solidFill>
-                  <a:srgbClr val="1E1E1E"/>
-                </a:solidFill>
-                <a:latin typeface="Arial"/>
-              </a:defRPr>
-            </a:pPr>
-            <a:r>
-              <a:rPr/>
-              <a:t>Дизайн простой, без лишних эффектов.</a:t>
-            </a:r>
-            <a:endParaRPr/>
-          </a:p>
-        </p:txBody>
-      </p:sp>
     </p:spTree>
   </p:cSld>
   <p:clrMapOvr>
